--- a/videos/machine-learning/03_ridger_regression_gradient_descent/recreated_pptx/slide_033_recreated.pptx
+++ b/videos/machine-learning/03_ridger_regression_gradient_descent/recreated_pptx/slide_033_recreated.pptx
@@ -1761,7 +1761,7 @@
             <a:r>
               <a:rPr lang="en-US" sz="1700" b="1" dirty="0">
                 <a:solidFill>
-                  <a:srgbClr val="000000"/>
+                  <a:srgbClr val="C00000"/>
                 </a:solidFill>
                 <a:latin typeface="Times New Roman" pitchFamily="34" charset="0"/>
                 <a:ea typeface="Times New Roman" pitchFamily="34" charset="-122"/>
@@ -2090,9 +2090,9 @@
         <p:spPr>
           <a:xfrm>
             <a:off x="7988300" y="2997200"/>
-            <a:ext cx="165100" cy="114300"/>
-          </a:xfrm>
-          <a:prstGeom prst="rect">
+            <a:ext cx="190500" cy="139700"/>
+          </a:xfrm>
+          <a:prstGeom prst="ellipse">
             <a:avLst/>
           </a:prstGeom>
           <a:solidFill>
@@ -2114,18 +2114,19 @@
         </p:nvSpPr>
         <p:spPr>
           <a:xfrm>
-            <a:off x="8788400" y="3276600"/>
-            <a:ext cx="-647700" cy="-152400"/>
+            <a:off x="8166100" y="3276600"/>
+            <a:ext cx="-76200" cy="-139700"/>
           </a:xfrm>
           <a:prstGeom prst="line">
             <a:avLst/>
           </a:prstGeom>
           <a:noFill/>
-          <a:ln w="15240">
+          <a:ln w="19050">
             <a:solidFill>
               <a:srgbClr val="000000"/>
             </a:solidFill>
             <a:prstDash val="solid"/>
+            <a:tailEnd type="triangle"/>
           </a:ln>
         </p:spPr>
       </p:sp>
